--- a/assets/pptx/catalog-377.pptx
+++ b/assets/pptx/catalog-377.pptx
@@ -3442,7 +3442,7 @@
                 <a:ea typeface="Ebrima"/>
                 <a:cs typeface="Ebrima"/>
               </a:rPr>
-              <a:t>ጨለማዩ በርቶ በአንተ ፍቅር ብቻ (2x)</a:t>
+              <a:t>ጨለማዩ በርቶ በአንተ ፍቅር ብቻ 2x</a:t>
             </a:r>
           </a:p>
         </p:txBody>
@@ -3707,7 +3707,7 @@
                 <a:ea typeface="Ebrima"/>
                 <a:cs typeface="Ebrima"/>
               </a:rPr>
-              <a:t>ሕይወቴ ተገኝቶ በአንተ ፍቅር ብቻ (2x)</a:t>
+              <a:t>ሕይወቴ ተገኝቶ በአንተ ፍቅር ብቻ 2x</a:t>
             </a:r>
           </a:p>
         </p:txBody>
@@ -4075,7 +4075,7 @@
                 <a:ea typeface="Ebrima"/>
                 <a:cs typeface="Ebrima"/>
               </a:rPr>
-              <a:t>ቤዛዩ እልሀለሁ (2x)</a:t>
+              <a:t>ቤዛዩ እልሀለሁ 2x</a:t>
             </a:r>
           </a:p>
           <a:p>
@@ -4111,7 +4111,7 @@
                 <a:ea typeface="Ebrima"/>
                 <a:cs typeface="Ebrima"/>
               </a:rPr>
-              <a:t>አዳኜ እልሀለሁ (2x)</a:t>
+              <a:t>አዳኜ እልሀለሁ 2x</a:t>
             </a:r>
           </a:p>
           <a:p>
